--- a/zanyatiya/Zanyatie_02_Slaydy.pptx
+++ b/zanyatiya/Zanyatie_02_Slaydy.pptx
@@ -1658,7 +1658,7 @@
     <p:bg>
       <p:bgPr>
         <a:solidFill>
-          <a:srgbClr val="005AAA"/>
+          <a:srgbClr val="1E4270"/>
         </a:solidFill>
       </p:bgPr>
     </p:bg>
@@ -1703,7 +1703,7 @@
             <a:r>
               <a:rPr lang="en-US" sz="1500" dirty="0">
                 <a:solidFill>
-                  <a:srgbClr val="A8C6E2"/>
+                  <a:srgbClr val="B9CBDE"/>
                 </a:solidFill>
                 <a:latin typeface="Arial" pitchFamily="34" charset="0"/>
                 <a:ea typeface="Arial" pitchFamily="34" charset="-122"/>
@@ -1804,7 +1804,7 @@
             <a:r>
               <a:rPr lang="en-US" sz="1200" dirty="0">
                 <a:solidFill>
-                  <a:srgbClr val="A8C6E2"/>
+                  <a:srgbClr val="B9CBDE"/>
                 </a:solidFill>
                 <a:latin typeface="Arial" pitchFamily="34" charset="0"/>
                 <a:ea typeface="Arial" pitchFamily="34" charset="-122"/>
@@ -1953,7 +1953,7 @@
             <a:r>
               <a:rPr lang="en-US" sz="1600" b="1" dirty="0">
                 <a:solidFill>
-                  <a:srgbClr val="E70F47"/>
+                  <a:srgbClr val="9E4257"/>
                 </a:solidFill>
                 <a:latin typeface="Arial" pitchFamily="34" charset="0"/>
                 <a:ea typeface="Arial" pitchFamily="34" charset="-122"/>
@@ -2031,7 +2031,7 @@
             <a:r>
               <a:rPr lang="en-US" sz="1600" b="1" dirty="0">
                 <a:solidFill>
-                  <a:srgbClr val="E70F47"/>
+                  <a:srgbClr val="9E4257"/>
                 </a:solidFill>
                 <a:latin typeface="Arial" pitchFamily="34" charset="0"/>
                 <a:ea typeface="Arial" pitchFamily="34" charset="-122"/>
@@ -2109,7 +2109,7 @@
             <a:r>
               <a:rPr lang="en-US" sz="1600" b="1" dirty="0">
                 <a:solidFill>
-                  <a:srgbClr val="E70F47"/>
+                  <a:srgbClr val="9E4257"/>
                 </a:solidFill>
                 <a:latin typeface="Arial" pitchFamily="34" charset="0"/>
                 <a:ea typeface="Arial" pitchFamily="34" charset="-122"/>
@@ -2213,7 +2213,7 @@
     <p:bg>
       <p:bgPr>
         <a:solidFill>
-          <a:srgbClr val="005AAA"/>
+          <a:srgbClr val="FFFFFF"/>
         </a:solidFill>
       </p:bgPr>
     </p:bg>
@@ -2258,7 +2258,7 @@
             <a:r>
               <a:rPr lang="en-US" sz="1200" spc="150" kern="0" dirty="0">
                 <a:solidFill>
-                  <a:srgbClr val="A8C6E2"/>
+                  <a:srgbClr val="64748B"/>
                 </a:solidFill>
                 <a:latin typeface="Arial" pitchFamily="34" charset="0"/>
                 <a:ea typeface="Arial" pitchFamily="34" charset="-122"/>
@@ -2278,9 +2278,75 @@
         </p:nvSpPr>
         <p:spPr>
           <a:xfrm>
-            <a:off x="502920" y="1188720"/>
+            <a:off x="502920" y="384048"/>
+            <a:ext cx="8138160" cy="731520"/>
+          </a:xfrm>
+          <a:prstGeom prst="rect">
+            <a:avLst/>
+          </a:prstGeom>
+          <a:noFill/>
+          <a:ln/>
+        </p:spPr>
+        <p:txBody>
+          <a:bodyPr wrap="square" lIns="0" tIns="0" rIns="0" bIns="0" rtlCol="0" anchor="ctr"/>
+          <a:lstStyle/>
+          <a:p>
+            <a:pPr indent="0" marL="0">
+              <a:buNone/>
+            </a:pPr>
+            <a:r>
+              <a:rPr lang="en-US" sz="3000" b="1" dirty="0">
+                <a:solidFill>
+                  <a:srgbClr val="005AAA"/>
+                </a:solidFill>
+                <a:latin typeface="Arial" pitchFamily="34" charset="0"/>
+                <a:ea typeface="Arial" pitchFamily="34" charset="-122"/>
+                <a:cs typeface="Arial" pitchFamily="34" charset="-120"/>
+              </a:rPr>
+              <a:t>Проект или нет?</a:t>
+            </a:r>
+            <a:endParaRPr lang="en-US" sz="3000" dirty="0"/>
+          </a:p>
+        </p:txBody>
+      </p:sp>
+      <p:sp>
+        <p:nvSpPr>
+          <p:cNvPr id="4" name="Shape 2"/>
+          <p:cNvSpPr/>
+          <p:nvPr/>
+        </p:nvSpPr>
+        <p:spPr>
+          <a:xfrm>
+            <a:off x="502920" y="1325880"/>
             <a:ext cx="8138160" cy="2651760"/>
           </a:xfrm>
+          <a:prstGeom prst="roundRect">
+            <a:avLst>
+              <a:gd name="adj" fmla="val 1724"/>
+            </a:avLst>
+          </a:prstGeom>
+          <a:solidFill>
+            <a:srgbClr val="1E4270"/>
+          </a:solidFill>
+          <a:ln w="12700">
+            <a:solidFill>
+              <a:srgbClr val="1E4270"/>
+            </a:solidFill>
+            <a:prstDash val="solid"/>
+          </a:ln>
+        </p:spPr>
+      </p:sp>
+      <p:sp>
+        <p:nvSpPr>
+          <p:cNvPr id="5" name="Text 3"/>
+          <p:cNvSpPr txBox="1"/>
+          <p:nvPr/>
+        </p:nvSpPr>
+        <p:spPr>
+          <a:xfrm>
+            <a:off x="868680" y="1600200"/>
+            <a:ext cx="7406640" cy="2148840"/>
+          </a:xfrm>
           <a:prstGeom prst="rect">
             <a:avLst/>
           </a:prstGeom>
@@ -2293,12 +2359,12 @@
           <a:p>
             <a:pPr indent="0" marL="0">
               <a:lnSpc>
-                <a:spcPts val="2800"/>
+                <a:spcPts val="2700"/>
               </a:lnSpc>
               <a:buNone/>
             </a:pPr>
             <a:r>
-              <a:rPr lang="en-US" sz="1900" dirty="0">
+              <a:rPr lang="en-US" sz="1800" dirty="0">
                 <a:solidFill>
                   <a:srgbClr val="FFFFFF"/>
                 </a:solidFill>
@@ -2308,26 +2374,26 @@
               </a:rPr>
               <a:t>1.  Еженедельная поверка вакуумметров</a:t>
             </a:r>
-            <a:endParaRPr lang="en-US" sz="1900" dirty="0"/>
+            <a:endParaRPr lang="en-US" sz="1800" dirty="0"/>
           </a:p>
           <a:p>
             <a:pPr indent="0" marL="0">
               <a:lnSpc>
-                <a:spcPts val="2800"/>
+                <a:spcPts val="2700"/>
               </a:lnSpc>
               <a:buNone/>
             </a:pPr>
-            <a:endParaRPr lang="en-US" sz="1900" dirty="0"/>
+            <a:endParaRPr lang="en-US" sz="1800" dirty="0"/>
           </a:p>
           <a:p>
             <a:pPr indent="0" marL="0">
               <a:lnSpc>
-                <a:spcPts val="2800"/>
+                <a:spcPts val="2700"/>
               </a:lnSpc>
               <a:buNone/>
             </a:pPr>
             <a:r>
-              <a:rPr lang="en-US" sz="1900" dirty="0">
+              <a:rPr lang="en-US" sz="1800" dirty="0">
                 <a:solidFill>
                   <a:srgbClr val="FFFFFF"/>
                 </a:solidFill>
@@ -2337,17 +2403,17 @@
               </a:rPr>
               <a:t>2.  Разработка методики измерения толщины плёнки,</a:t>
             </a:r>
-            <a:endParaRPr lang="en-US" sz="1900" dirty="0"/>
+            <a:endParaRPr lang="en-US" sz="1800" dirty="0"/>
           </a:p>
           <a:p>
             <a:pPr indent="0" marL="0">
               <a:lnSpc>
-                <a:spcPts val="2800"/>
+                <a:spcPts val="2700"/>
               </a:lnSpc>
               <a:buNone/>
             </a:pPr>
             <a:r>
-              <a:rPr lang="en-US" sz="1900" dirty="0">
+              <a:rPr lang="en-US" sz="1800" dirty="0">
                 <a:solidFill>
                   <a:srgbClr val="FFFFFF"/>
                 </a:solidFill>
@@ -2355,28 +2421,28 @@
                 <a:ea typeface="Arial" pitchFamily="34" charset="-122"/>
                 <a:cs typeface="Arial" pitchFamily="34" charset="-120"/>
               </a:rPr>
-              <a:t>     которой в лаборатории нет</a:t>
-            </a:r>
-            <a:endParaRPr lang="en-US" sz="1900" dirty="0"/>
+              <a:t>     которой в лаборатории пока нет</a:t>
+            </a:r>
+            <a:endParaRPr lang="en-US" sz="1800" dirty="0"/>
           </a:p>
           <a:p>
             <a:pPr indent="0" marL="0">
               <a:lnSpc>
-                <a:spcPts val="2800"/>
+                <a:spcPts val="2700"/>
               </a:lnSpc>
               <a:buNone/>
             </a:pPr>
-            <a:endParaRPr lang="en-US" sz="1900" dirty="0"/>
+            <a:endParaRPr lang="en-US" sz="1800" dirty="0"/>
           </a:p>
           <a:p>
             <a:pPr indent="0" marL="0">
               <a:lnSpc>
-                <a:spcPts val="2800"/>
+                <a:spcPts val="2700"/>
               </a:lnSpc>
               <a:buNone/>
             </a:pPr>
             <a:r>
-              <a:rPr lang="en-US" sz="1900" dirty="0">
+              <a:rPr lang="en-US" sz="1800" dirty="0">
                 <a:solidFill>
                   <a:srgbClr val="FFFFFF"/>
                 </a:solidFill>
@@ -2386,17 +2452,17 @@
               </a:rPr>
               <a:t>3.  Лабораторная работа по методичке,</a:t>
             </a:r>
-            <a:endParaRPr lang="en-US" sz="1900" dirty="0"/>
+            <a:endParaRPr lang="en-US" sz="1800" dirty="0"/>
           </a:p>
           <a:p>
             <a:pPr indent="0" marL="0">
               <a:lnSpc>
-                <a:spcPts val="2800"/>
+                <a:spcPts val="2700"/>
               </a:lnSpc>
               <a:buNone/>
             </a:pPr>
             <a:r>
-              <a:rPr lang="en-US" sz="1900" dirty="0">
+              <a:rPr lang="en-US" sz="1800" dirty="0">
                 <a:solidFill>
                   <a:srgbClr val="FFFFFF"/>
                 </a:solidFill>
@@ -2406,46 +2472,46 @@
               </a:rPr>
               <a:t>     которую до вас делали двести человек</a:t>
             </a:r>
-            <a:endParaRPr lang="en-US" sz="1900" dirty="0"/>
-          </a:p>
-        </p:txBody>
-      </p:sp>
-      <p:sp>
-        <p:nvSpPr>
-          <p:cNvPr id="4" name="Text 2"/>
-          <p:cNvSpPr txBox="1"/>
-          <p:nvPr/>
-        </p:nvSpPr>
-        <p:spPr>
-          <a:xfrm>
-            <a:off x="502920" y="4023360"/>
-            <a:ext cx="8138160" cy="365760"/>
-          </a:xfrm>
-          <a:prstGeom prst="rect">
-            <a:avLst/>
-          </a:prstGeom>
-          <a:noFill/>
-          <a:ln/>
-        </p:spPr>
-        <p:txBody>
-          <a:bodyPr wrap="square" lIns="0" tIns="0" rIns="0" bIns="0" rtlCol="0" anchor="ctr"/>
-          <a:lstStyle/>
-          <a:p>
-            <a:pPr indent="0" marL="0">
-              <a:buNone/>
-            </a:pPr>
-            <a:r>
-              <a:rPr lang="en-US" sz="2000" b="1" dirty="0">
-                <a:solidFill>
-                  <a:srgbClr val="D6E6F2"/>
-                </a:solidFill>
-                <a:latin typeface="Arial" pitchFamily="34" charset="0"/>
-                <a:ea typeface="Arial" pitchFamily="34" charset="-122"/>
-                <a:cs typeface="Arial" pitchFamily="34" charset="-120"/>
-              </a:rPr>
-              <a:t>Проект или нет?</a:t>
-            </a:r>
-            <a:endParaRPr lang="en-US" sz="2000" dirty="0"/>
+            <a:endParaRPr lang="en-US" sz="1800" dirty="0"/>
+          </a:p>
+        </p:txBody>
+      </p:sp>
+      <p:sp>
+        <p:nvSpPr>
+          <p:cNvPr id="6" name="Text 4"/>
+          <p:cNvSpPr txBox="1"/>
+          <p:nvPr/>
+        </p:nvSpPr>
+        <p:spPr>
+          <a:xfrm>
+            <a:off x="502920" y="4160520"/>
+            <a:ext cx="8138160" cy="320040"/>
+          </a:xfrm>
+          <a:prstGeom prst="rect">
+            <a:avLst/>
+          </a:prstGeom>
+          <a:noFill/>
+          <a:ln/>
+        </p:spPr>
+        <p:txBody>
+          <a:bodyPr wrap="square" lIns="0" tIns="0" rIns="0" bIns="0" rtlCol="0" anchor="ctr"/>
+          <a:lstStyle/>
+          <a:p>
+            <a:pPr indent="0" marL="0">
+              <a:buNone/>
+            </a:pPr>
+            <a:r>
+              <a:rPr lang="en-US" sz="1400" dirty="0">
+                <a:solidFill>
+                  <a:srgbClr val="64748B"/>
+                </a:solidFill>
+                <a:latin typeface="Arial" pitchFamily="34" charset="0"/>
+                <a:ea typeface="Arial" pitchFamily="34" charset="-122"/>
+                <a:cs typeface="Arial" pitchFamily="34" charset="-120"/>
+              </a:rPr>
+              <a:t>Голосуем поднятием руки после каждого. Ответ будет через двадцать минут.</a:t>
+            </a:r>
+            <a:endParaRPr lang="en-US" sz="1400" dirty="0"/>
           </a:p>
         </p:txBody>
       </p:sp>
@@ -2576,11 +2642,11 @@
             </a:avLst>
           </a:prstGeom>
           <a:solidFill>
-            <a:srgbClr val="F8FAFC"/>
+            <a:srgbClr val="F5F7FA"/>
           </a:solidFill>
           <a:ln w="9525">
             <a:solidFill>
-              <a:srgbClr val="CBD5E1"/>
+              <a:srgbClr val="D8DEE6"/>
             </a:solidFill>
             <a:prstDash val="solid"/>
           </a:ln>
@@ -2613,7 +2679,7 @@
             <a:r>
               <a:rPr lang="en-US" sz="2400" b="1" dirty="0">
                 <a:solidFill>
-                  <a:srgbClr val="E70F47"/>
+                  <a:srgbClr val="9E4257"/>
                 </a:solidFill>
                 <a:latin typeface="Arial" pitchFamily="34" charset="0"/>
                 <a:ea typeface="Arial" pitchFamily="34" charset="-122"/>
@@ -2720,11 +2786,11 @@
             </a:avLst>
           </a:prstGeom>
           <a:solidFill>
-            <a:srgbClr val="F8FAFC"/>
+            <a:srgbClr val="F5F7FA"/>
           </a:solidFill>
           <a:ln w="9525">
             <a:solidFill>
-              <a:srgbClr val="CBD5E1"/>
+              <a:srgbClr val="D8DEE6"/>
             </a:solidFill>
             <a:prstDash val="solid"/>
           </a:ln>
@@ -2757,7 +2823,7 @@
             <a:r>
               <a:rPr lang="en-US" sz="2400" b="1" dirty="0">
                 <a:solidFill>
-                  <a:srgbClr val="E70F47"/>
+                  <a:srgbClr val="9E4257"/>
                 </a:solidFill>
                 <a:latin typeface="Arial" pitchFamily="34" charset="0"/>
                 <a:ea typeface="Arial" pitchFamily="34" charset="-122"/>
@@ -2864,11 +2930,11 @@
             </a:avLst>
           </a:prstGeom>
           <a:solidFill>
-            <a:srgbClr val="F8FAFC"/>
+            <a:srgbClr val="F5F7FA"/>
           </a:solidFill>
           <a:ln w="9525">
             <a:solidFill>
-              <a:srgbClr val="CBD5E1"/>
+              <a:srgbClr val="D8DEE6"/>
             </a:solidFill>
             <a:prstDash val="solid"/>
           </a:ln>
@@ -2901,7 +2967,7 @@
             <a:r>
               <a:rPr lang="en-US" sz="2400" b="1" dirty="0">
                 <a:solidFill>
-                  <a:srgbClr val="E70F47"/>
+                  <a:srgbClr val="9E4257"/>
                 </a:solidFill>
                 <a:latin typeface="Arial" pitchFamily="34" charset="0"/>
                 <a:ea typeface="Arial" pitchFamily="34" charset="-122"/>
@@ -3005,7 +3071,7 @@
     <p:bg>
       <p:bgPr>
         <a:solidFill>
-          <a:srgbClr val="005AAA"/>
+          <a:srgbClr val="FFFFFF"/>
         </a:solidFill>
       </p:bgPr>
     </p:bg>
@@ -3031,8 +3097,113 @@
         </p:nvSpPr>
         <p:spPr>
           <a:xfrm>
-            <a:off x="502920" y="1554480"/>
-            <a:ext cx="8138160" cy="1280160"/>
+            <a:off x="502920" y="201168"/>
+            <a:ext cx="8138160" cy="237744"/>
+          </a:xfrm>
+          <a:prstGeom prst="rect">
+            <a:avLst/>
+          </a:prstGeom>
+          <a:noFill/>
+          <a:ln/>
+        </p:spPr>
+        <p:txBody>
+          <a:bodyPr wrap="square" lIns="0" tIns="0" rIns="0" bIns="0" rtlCol="0" anchor="ctr"/>
+          <a:lstStyle/>
+          <a:p>
+            <a:pPr indent="0" marL="0">
+              <a:buNone/>
+            </a:pPr>
+            <a:r>
+              <a:rPr lang="en-US" sz="1200" spc="150" kern="0" dirty="0">
+                <a:solidFill>
+                  <a:srgbClr val="64748B"/>
+                </a:solidFill>
+                <a:latin typeface="Arial" pitchFamily="34" charset="0"/>
+                <a:ea typeface="Arial" pitchFamily="34" charset="-122"/>
+                <a:cs typeface="Arial" pitchFamily="34" charset="-120"/>
+              </a:rPr>
+              <a:t>ТИПОВАЯ ОШИБКА</a:t>
+            </a:r>
+            <a:endParaRPr lang="en-US" sz="1200" dirty="0"/>
+          </a:p>
+        </p:txBody>
+      </p:sp>
+      <p:sp>
+        <p:nvSpPr>
+          <p:cNvPr id="3" name="Text 1"/>
+          <p:cNvSpPr txBox="1"/>
+          <p:nvPr/>
+        </p:nvSpPr>
+        <p:spPr>
+          <a:xfrm>
+            <a:off x="502920" y="384048"/>
+            <a:ext cx="8138160" cy="731520"/>
+          </a:xfrm>
+          <a:prstGeom prst="rect">
+            <a:avLst/>
+          </a:prstGeom>
+          <a:noFill/>
+          <a:ln/>
+        </p:spPr>
+        <p:txBody>
+          <a:bodyPr wrap="square" lIns="0" tIns="0" rIns="0" bIns="0" rtlCol="0" anchor="ctr"/>
+          <a:lstStyle/>
+          <a:p>
+            <a:pPr indent="0" marL="0">
+              <a:buNone/>
+            </a:pPr>
+            <a:r>
+              <a:rPr lang="en-US" sz="3000" b="1" dirty="0">
+                <a:solidFill>
+                  <a:srgbClr val="005AAA"/>
+                </a:solidFill>
+                <a:latin typeface="Arial" pitchFamily="34" charset="0"/>
+                <a:ea typeface="Arial" pitchFamily="34" charset="-122"/>
+                <a:cs typeface="Arial" pitchFamily="34" charset="-120"/>
+              </a:rPr>
+              <a:t>Объём работы не делает её проектом</a:t>
+            </a:r>
+            <a:endParaRPr lang="en-US" sz="3000" dirty="0"/>
+          </a:p>
+        </p:txBody>
+      </p:sp>
+      <p:sp>
+        <p:nvSpPr>
+          <p:cNvPr id="4" name="Shape 2"/>
+          <p:cNvSpPr/>
+          <p:nvPr/>
+        </p:nvSpPr>
+        <p:spPr>
+          <a:xfrm>
+            <a:off x="502920" y="1463040"/>
+            <a:ext cx="3977640" cy="1371600"/>
+          </a:xfrm>
+          <a:prstGeom prst="roundRect">
+            <a:avLst>
+              <a:gd name="adj" fmla="val 4000"/>
+            </a:avLst>
+          </a:prstGeom>
+          <a:solidFill>
+            <a:srgbClr val="F5F7FA"/>
+          </a:solidFill>
+          <a:ln w="9525">
+            <a:solidFill>
+              <a:srgbClr val="D8DEE6"/>
+            </a:solidFill>
+            <a:prstDash val="solid"/>
+          </a:ln>
+        </p:spPr>
+      </p:sp>
+      <p:sp>
+        <p:nvSpPr>
+          <p:cNvPr id="5" name="Text 3"/>
+          <p:cNvSpPr txBox="1"/>
+          <p:nvPr/>
+        </p:nvSpPr>
+        <p:spPr>
+          <a:xfrm>
+            <a:off x="777240" y="1691640"/>
+            <a:ext cx="3429000" cy="640080"/>
           </a:xfrm>
           <a:prstGeom prst="rect">
             <a:avLst/>
@@ -3046,55 +3217,222 @@
           <a:p>
             <a:pPr indent="0" marL="0">
               <a:lnSpc>
-                <a:spcPts val="4600"/>
+                <a:spcPts val="2200"/>
               </a:lnSpc>
               <a:buNone/>
             </a:pPr>
             <a:r>
-              <a:rPr lang="en-US" sz="3600" b="1" dirty="0">
-                <a:solidFill>
-                  <a:srgbClr val="FFFFFF"/>
-                </a:solidFill>
-                <a:latin typeface="Arial" pitchFamily="34" charset="0"/>
-                <a:ea typeface="Arial" pitchFamily="34" charset="-122"/>
-                <a:cs typeface="Arial" pitchFamily="34" charset="-120"/>
-              </a:rPr>
-              <a:t>Объём работы</a:t>
-            </a:r>
-            <a:endParaRPr lang="en-US" sz="3600" dirty="0"/>
+              <a:rPr lang="en-US" sz="1600" b="1" dirty="0">
+                <a:solidFill>
+                  <a:srgbClr val="1E293B"/>
+                </a:solidFill>
+                <a:latin typeface="Arial" pitchFamily="34" charset="0"/>
+                <a:ea typeface="Arial" pitchFamily="34" charset="-122"/>
+                <a:cs typeface="Arial" pitchFamily="34" charset="-120"/>
+              </a:rPr>
+              <a:t>Три дня обработки данных</a:t>
+            </a:r>
+            <a:endParaRPr lang="en-US" sz="1600" dirty="0"/>
           </a:p>
           <a:p>
             <a:pPr indent="0" marL="0">
               <a:lnSpc>
-                <a:spcPts val="4600"/>
+                <a:spcPts val="2200"/>
               </a:lnSpc>
               <a:buNone/>
             </a:pPr>
             <a:r>
-              <a:rPr lang="en-US" sz="3600" b="1" dirty="0">
-                <a:solidFill>
-                  <a:srgbClr val="FFFFFF"/>
-                </a:solidFill>
-                <a:latin typeface="Arial" pitchFamily="34" charset="0"/>
-                <a:ea typeface="Arial" pitchFamily="34" charset="-122"/>
-                <a:cs typeface="Arial" pitchFamily="34" charset="-120"/>
-              </a:rPr>
-              <a:t>не делает её проектом</a:t>
-            </a:r>
-            <a:endParaRPr lang="en-US" sz="3600" dirty="0"/>
-          </a:p>
-        </p:txBody>
-      </p:sp>
-      <p:sp>
-        <p:nvSpPr>
-          <p:cNvPr id="3" name="Text 1"/>
+              <a:rPr lang="en-US" sz="1600" b="1" dirty="0">
+                <a:solidFill>
+                  <a:srgbClr val="1E293B"/>
+                </a:solidFill>
+                <a:latin typeface="Arial" pitchFamily="34" charset="0"/>
+                <a:ea typeface="Arial" pitchFamily="34" charset="-122"/>
+                <a:cs typeface="Arial" pitchFamily="34" charset="-120"/>
+              </a:rPr>
+              <a:t>по готовому скрипту</a:t>
+            </a:r>
+            <a:endParaRPr lang="en-US" sz="1600" dirty="0"/>
+          </a:p>
+        </p:txBody>
+      </p:sp>
+      <p:sp>
+        <p:nvSpPr>
+          <p:cNvPr id="6" name="Text 4"/>
+          <p:cNvSpPr txBox="1"/>
+          <p:nvPr/>
+        </p:nvSpPr>
+        <p:spPr>
+          <a:xfrm>
+            <a:off x="777240" y="2377440"/>
+            <a:ext cx="3429000" cy="320040"/>
+          </a:xfrm>
+          <a:prstGeom prst="rect">
+            <a:avLst/>
+          </a:prstGeom>
+          <a:noFill/>
+          <a:ln/>
+        </p:spPr>
+        <p:txBody>
+          <a:bodyPr wrap="square" lIns="0" tIns="0" rIns="0" bIns="0" rtlCol="0" anchor="ctr"/>
+          <a:lstStyle/>
+          <a:p>
+            <a:pPr indent="0" marL="0">
+              <a:buNone/>
+            </a:pPr>
+            <a:r>
+              <a:rPr lang="en-US" sz="1500" dirty="0">
+                <a:solidFill>
+                  <a:srgbClr val="64748B"/>
+                </a:solidFill>
+                <a:latin typeface="Arial" pitchFamily="34" charset="0"/>
+                <a:ea typeface="Arial" pitchFamily="34" charset="-122"/>
+                <a:cs typeface="Arial" pitchFamily="34" charset="-120"/>
+              </a:rPr>
+              <a:t>это три дня работы</a:t>
+            </a:r>
+            <a:endParaRPr lang="en-US" sz="1500" dirty="0"/>
+          </a:p>
+        </p:txBody>
+      </p:sp>
+      <p:sp>
+        <p:nvSpPr>
+          <p:cNvPr id="7" name="Shape 5"/>
+          <p:cNvSpPr/>
+          <p:nvPr/>
+        </p:nvSpPr>
+        <p:spPr>
+          <a:xfrm>
+            <a:off x="4663440" y="1463040"/>
+            <a:ext cx="3977640" cy="1371600"/>
+          </a:xfrm>
+          <a:prstGeom prst="roundRect">
+            <a:avLst>
+              <a:gd name="adj" fmla="val 4000"/>
+            </a:avLst>
+          </a:prstGeom>
+          <a:solidFill>
+            <a:srgbClr val="F5F7FA"/>
+          </a:solidFill>
+          <a:ln w="9525">
+            <a:solidFill>
+              <a:srgbClr val="D8DEE6"/>
+            </a:solidFill>
+            <a:prstDash val="solid"/>
+          </a:ln>
+        </p:spPr>
+      </p:sp>
+      <p:sp>
+        <p:nvSpPr>
+          <p:cNvPr id="8" name="Text 6"/>
+          <p:cNvSpPr txBox="1"/>
+          <p:nvPr/>
+        </p:nvSpPr>
+        <p:spPr>
+          <a:xfrm>
+            <a:off x="4937760" y="1691640"/>
+            <a:ext cx="3429000" cy="640080"/>
+          </a:xfrm>
+          <a:prstGeom prst="rect">
+            <a:avLst/>
+          </a:prstGeom>
+          <a:noFill/>
+          <a:ln/>
+        </p:spPr>
+        <p:txBody>
+          <a:bodyPr wrap="square" lIns="0" tIns="0" rIns="0" bIns="0" rtlCol="0" anchor="ctr"/>
+          <a:lstStyle/>
+          <a:p>
+            <a:pPr indent="0" marL="0">
+              <a:lnSpc>
+                <a:spcPts val="2200"/>
+              </a:lnSpc>
+              <a:buNone/>
+            </a:pPr>
+            <a:r>
+              <a:rPr lang="en-US" sz="1600" b="1" dirty="0">
+                <a:solidFill>
+                  <a:srgbClr val="1E293B"/>
+                </a:solidFill>
+                <a:latin typeface="Arial" pitchFamily="34" charset="0"/>
+                <a:ea typeface="Arial" pitchFamily="34" charset="-122"/>
+                <a:cs typeface="Arial" pitchFamily="34" charset="-120"/>
+              </a:rPr>
+              <a:t>Замысел на две недели,</a:t>
+            </a:r>
+            <a:endParaRPr lang="en-US" sz="1600" dirty="0"/>
+          </a:p>
+          <a:p>
+            <a:pPr indent="0" marL="0">
+              <a:lnSpc>
+                <a:spcPts val="2200"/>
+              </a:lnSpc>
+              <a:buNone/>
+            </a:pPr>
+            <a:r>
+              <a:rPr lang="en-US" sz="1600" b="1" dirty="0">
+                <a:solidFill>
+                  <a:srgbClr val="1E293B"/>
+                </a:solidFill>
+                <a:latin typeface="Arial" pitchFamily="34" charset="0"/>
+                <a:ea typeface="Arial" pitchFamily="34" charset="-122"/>
+                <a:cs typeface="Arial" pitchFamily="34" charset="-120"/>
+              </a:rPr>
+              <a:t>где непонятно, выйдет ли</a:t>
+            </a:r>
+            <a:endParaRPr lang="en-US" sz="1600" dirty="0"/>
+          </a:p>
+        </p:txBody>
+      </p:sp>
+      <p:sp>
+        <p:nvSpPr>
+          <p:cNvPr id="9" name="Text 7"/>
+          <p:cNvSpPr txBox="1"/>
+          <p:nvPr/>
+        </p:nvSpPr>
+        <p:spPr>
+          <a:xfrm>
+            <a:off x="4937760" y="2377440"/>
+            <a:ext cx="3429000" cy="320040"/>
+          </a:xfrm>
+          <a:prstGeom prst="rect">
+            <a:avLst/>
+          </a:prstGeom>
+          <a:noFill/>
+          <a:ln/>
+        </p:spPr>
+        <p:txBody>
+          <a:bodyPr wrap="square" lIns="0" tIns="0" rIns="0" bIns="0" rtlCol="0" anchor="ctr"/>
+          <a:lstStyle/>
+          <a:p>
+            <a:pPr indent="0" marL="0">
+              <a:buNone/>
+            </a:pPr>
+            <a:r>
+              <a:rPr lang="en-US" sz="1500" b="1" dirty="0">
+                <a:solidFill>
+                  <a:srgbClr val="9E4257"/>
+                </a:solidFill>
+                <a:latin typeface="Arial" pitchFamily="34" charset="0"/>
+                <a:ea typeface="Arial" pitchFamily="34" charset="-122"/>
+                <a:cs typeface="Arial" pitchFamily="34" charset="-120"/>
+              </a:rPr>
+              <a:t>это проект</a:t>
+            </a:r>
+            <a:endParaRPr lang="en-US" sz="1500" dirty="0"/>
+          </a:p>
+        </p:txBody>
+      </p:sp>
+      <p:sp>
+        <p:nvSpPr>
+          <p:cNvPr id="10" name="Text 8"/>
           <p:cNvSpPr txBox="1"/>
           <p:nvPr/>
         </p:nvSpPr>
         <p:spPr>
           <a:xfrm>
             <a:off x="502920" y="3200400"/>
-            <a:ext cx="8138160" cy="731520"/>
+            <a:ext cx="8138160" cy="457200"/>
           </a:xfrm>
           <a:prstGeom prst="rect">
             <a:avLst/>
@@ -3112,13 +3450,13 @@
             <a:r>
               <a:rPr lang="en-US" sz="1500" dirty="0">
                 <a:solidFill>
-                  <a:srgbClr val="D6E6F2"/>
-                </a:solidFill>
-                <a:latin typeface="Arial" pitchFamily="34" charset="0"/>
-                <a:ea typeface="Arial" pitchFamily="34" charset="-122"/>
-                <a:cs typeface="Arial" pitchFamily="34" charset="-120"/>
-              </a:rPr>
-              <a:t>Три дня обработки данных по готовому скрипту — это три дня работы. Замысел на две недели, где непонятно, выйдет ли, — проект.</a:t>
+                  <a:srgbClr val="1E293B"/>
+                </a:solidFill>
+                <a:latin typeface="Arial" pitchFamily="34" charset="0"/>
+                <a:ea typeface="Arial" pitchFamily="34" charset="-122"/>
+                <a:cs typeface="Arial" pitchFamily="34" charset="-120"/>
+              </a:rPr>
+              <a:t>Признак — не сложность и не количество часов, а знаете ли вы заранее, что получится.</a:t>
             </a:r>
             <a:endParaRPr lang="en-US" sz="1500" dirty="0"/>
           </a:p>
@@ -3291,7 +3629,7 @@
                   <a:tcPr marL="91440" marR="91440" marT="45720" marB="45720" anchor="ctr">
                     <a:lnL w="6350" cap="flat" cmpd="sng" algn="ctr">
                       <a:solidFill>
-                        <a:srgbClr val="CBD5E1"/>
+                        <a:srgbClr val="D8DEE6"/>
                       </a:solidFill>
                       <a:prstDash val="solid"/>
                       <a:round/>
@@ -3300,7 +3638,7 @@
                     </a:lnL>
                     <a:lnR w="6350" cap="flat" cmpd="sng" algn="ctr">
                       <a:solidFill>
-                        <a:srgbClr val="CBD5E1"/>
+                        <a:srgbClr val="D8DEE6"/>
                       </a:solidFill>
                       <a:prstDash val="solid"/>
                       <a:round/>
@@ -3309,7 +3647,7 @@
                     </a:lnR>
                     <a:lnT w="6350" cap="flat" cmpd="sng" algn="ctr">
                       <a:solidFill>
-                        <a:srgbClr val="CBD5E1"/>
+                        <a:srgbClr val="D8DEE6"/>
                       </a:solidFill>
                       <a:prstDash val="solid"/>
                       <a:round/>
@@ -3318,7 +3656,7 @@
                     </a:lnT>
                     <a:lnB w="6350" cap="flat" cmpd="sng" algn="ctr">
                       <a:solidFill>
-                        <a:srgbClr val="CBD5E1"/>
+                        <a:srgbClr val="D8DEE6"/>
                       </a:solidFill>
                       <a:prstDash val="solid"/>
                       <a:round/>
@@ -3326,7 +3664,7 @@
                       <a:tailEnd type="none" w="med" len="med"/>
                     </a:lnB>
                     <a:solidFill>
-                      <a:srgbClr val="005AAA"/>
+                      <a:srgbClr val="1E4270"/>
                     </a:solidFill>
                   </a:tcPr>
                 </a:tc>
@@ -3359,7 +3697,7 @@
                   <a:tcPr marL="91440" marR="91440" marT="45720" marB="45720" anchor="ctr">
                     <a:lnL w="6350" cap="flat" cmpd="sng" algn="ctr">
                       <a:solidFill>
-                        <a:srgbClr val="CBD5E1"/>
+                        <a:srgbClr val="D8DEE6"/>
                       </a:solidFill>
                       <a:prstDash val="solid"/>
                       <a:round/>
@@ -3368,7 +3706,7 @@
                     </a:lnL>
                     <a:lnR w="6350" cap="flat" cmpd="sng" algn="ctr">
                       <a:solidFill>
-                        <a:srgbClr val="CBD5E1"/>
+                        <a:srgbClr val="D8DEE6"/>
                       </a:solidFill>
                       <a:prstDash val="solid"/>
                       <a:round/>
@@ -3377,7 +3715,7 @@
                     </a:lnR>
                     <a:lnT w="6350" cap="flat" cmpd="sng" algn="ctr">
                       <a:solidFill>
-                        <a:srgbClr val="CBD5E1"/>
+                        <a:srgbClr val="D8DEE6"/>
                       </a:solidFill>
                       <a:prstDash val="solid"/>
                       <a:round/>
@@ -3386,7 +3724,7 @@
                     </a:lnT>
                     <a:lnB w="6350" cap="flat" cmpd="sng" algn="ctr">
                       <a:solidFill>
-                        <a:srgbClr val="CBD5E1"/>
+                        <a:srgbClr val="D8DEE6"/>
                       </a:solidFill>
                       <a:prstDash val="solid"/>
                       <a:round/>
@@ -3394,7 +3732,7 @@
                       <a:tailEnd type="none" w="med" len="med"/>
                     </a:lnB>
                     <a:solidFill>
-                      <a:srgbClr val="4A7FB5"/>
+                      <a:srgbClr val="5E7FA6"/>
                     </a:solidFill>
                   </a:tcPr>
                 </a:tc>
@@ -3427,7 +3765,7 @@
                   <a:tcPr marL="91440" marR="91440" marT="45720" marB="45720" anchor="ctr">
                     <a:lnL w="6350" cap="flat" cmpd="sng" algn="ctr">
                       <a:solidFill>
-                        <a:srgbClr val="CBD5E1"/>
+                        <a:srgbClr val="D8DEE6"/>
                       </a:solidFill>
                       <a:prstDash val="solid"/>
                       <a:round/>
@@ -3436,7 +3774,7 @@
                     </a:lnL>
                     <a:lnR w="6350" cap="flat" cmpd="sng" algn="ctr">
                       <a:solidFill>
-                        <a:srgbClr val="CBD5E1"/>
+                        <a:srgbClr val="D8DEE6"/>
                       </a:solidFill>
                       <a:prstDash val="solid"/>
                       <a:round/>
@@ -3445,7 +3783,7 @@
                     </a:lnR>
                     <a:lnT w="6350" cap="flat" cmpd="sng" algn="ctr">
                       <a:solidFill>
-                        <a:srgbClr val="CBD5E1"/>
+                        <a:srgbClr val="D8DEE6"/>
                       </a:solidFill>
                       <a:prstDash val="solid"/>
                       <a:round/>
@@ -3454,7 +3792,7 @@
                     </a:lnT>
                     <a:lnB w="6350" cap="flat" cmpd="sng" algn="ctr">
                       <a:solidFill>
-                        <a:srgbClr val="CBD5E1"/>
+                        <a:srgbClr val="D8DEE6"/>
                       </a:solidFill>
                       <a:prstDash val="solid"/>
                       <a:round/>
@@ -3462,7 +3800,7 @@
                       <a:tailEnd type="none" w="med" len="med"/>
                     </a:lnB>
                     <a:solidFill>
-                      <a:srgbClr val="4A7FB5"/>
+                      <a:srgbClr val="5E7FA6"/>
                     </a:solidFill>
                   </a:tcPr>
                 </a:tc>
@@ -3497,7 +3835,7 @@
                   <a:tcPr marL="91440" marR="91440" marT="45720" marB="45720" anchor="ctr">
                     <a:lnL w="6350" cap="flat" cmpd="sng" algn="ctr">
                       <a:solidFill>
-                        <a:srgbClr val="CBD5E1"/>
+                        <a:srgbClr val="D8DEE6"/>
                       </a:solidFill>
                       <a:prstDash val="solid"/>
                       <a:round/>
@@ -3506,7 +3844,7 @@
                     </a:lnL>
                     <a:lnR w="6350" cap="flat" cmpd="sng" algn="ctr">
                       <a:solidFill>
-                        <a:srgbClr val="CBD5E1"/>
+                        <a:srgbClr val="D8DEE6"/>
                       </a:solidFill>
                       <a:prstDash val="solid"/>
                       <a:round/>
@@ -3515,7 +3853,7 @@
                     </a:lnR>
                     <a:lnT w="6350" cap="flat" cmpd="sng" algn="ctr">
                       <a:solidFill>
-                        <a:srgbClr val="CBD5E1"/>
+                        <a:srgbClr val="D8DEE6"/>
                       </a:solidFill>
                       <a:prstDash val="solid"/>
                       <a:round/>
@@ -3524,7 +3862,7 @@
                     </a:lnT>
                     <a:lnB w="6350" cap="flat" cmpd="sng" algn="ctr">
                       <a:solidFill>
-                        <a:srgbClr val="CBD5E1"/>
+                        <a:srgbClr val="D8DEE6"/>
                       </a:solidFill>
                       <a:prstDash val="solid"/>
                       <a:round/>
@@ -3562,7 +3900,7 @@
                   <a:tcPr marL="91440" marR="91440" marT="45720" marB="45720" anchor="ctr">
                     <a:lnL w="6350" cap="flat" cmpd="sng" algn="ctr">
                       <a:solidFill>
-                        <a:srgbClr val="CBD5E1"/>
+                        <a:srgbClr val="D8DEE6"/>
                       </a:solidFill>
                       <a:prstDash val="solid"/>
                       <a:round/>
@@ -3571,7 +3909,7 @@
                     </a:lnL>
                     <a:lnR w="6350" cap="flat" cmpd="sng" algn="ctr">
                       <a:solidFill>
-                        <a:srgbClr val="CBD5E1"/>
+                        <a:srgbClr val="D8DEE6"/>
                       </a:solidFill>
                       <a:prstDash val="solid"/>
                       <a:round/>
@@ -3580,7 +3918,7 @@
                     </a:lnR>
                     <a:lnT w="6350" cap="flat" cmpd="sng" algn="ctr">
                       <a:solidFill>
-                        <a:srgbClr val="CBD5E1"/>
+                        <a:srgbClr val="D8DEE6"/>
                       </a:solidFill>
                       <a:prstDash val="solid"/>
                       <a:round/>
@@ -3589,7 +3927,7 @@
                     </a:lnT>
                     <a:lnB w="6350" cap="flat" cmpd="sng" algn="ctr">
                       <a:solidFill>
-                        <a:srgbClr val="CBD5E1"/>
+                        <a:srgbClr val="D8DEE6"/>
                       </a:solidFill>
                       <a:prstDash val="solid"/>
                       <a:round/>
@@ -3627,7 +3965,7 @@
                   <a:tcPr marL="91440" marR="91440" marT="45720" marB="45720" anchor="ctr">
                     <a:lnL w="6350" cap="flat" cmpd="sng" algn="ctr">
                       <a:solidFill>
-                        <a:srgbClr val="CBD5E1"/>
+                        <a:srgbClr val="D8DEE6"/>
                       </a:solidFill>
                       <a:prstDash val="solid"/>
                       <a:round/>
@@ -3636,7 +3974,7 @@
                     </a:lnL>
                     <a:lnR w="6350" cap="flat" cmpd="sng" algn="ctr">
                       <a:solidFill>
-                        <a:srgbClr val="CBD5E1"/>
+                        <a:srgbClr val="D8DEE6"/>
                       </a:solidFill>
                       <a:prstDash val="solid"/>
                       <a:round/>
@@ -3645,7 +3983,7 @@
                     </a:lnR>
                     <a:lnT w="6350" cap="flat" cmpd="sng" algn="ctr">
                       <a:solidFill>
-                        <a:srgbClr val="CBD5E1"/>
+                        <a:srgbClr val="D8DEE6"/>
                       </a:solidFill>
                       <a:prstDash val="solid"/>
                       <a:round/>
@@ -3654,7 +3992,7 @@
                     </a:lnT>
                     <a:lnB w="6350" cap="flat" cmpd="sng" algn="ctr">
                       <a:solidFill>
-                        <a:srgbClr val="CBD5E1"/>
+                        <a:srgbClr val="D8DEE6"/>
                       </a:solidFill>
                       <a:prstDash val="solid"/>
                       <a:round/>
@@ -3721,7 +4059,7 @@
     <p:bg>
       <p:bgPr>
         <a:solidFill>
-          <a:srgbClr val="005AAA"/>
+          <a:srgbClr val="1E4270"/>
         </a:solidFill>
       </p:bgPr>
     </p:bg>
@@ -3844,7 +4182,7 @@
             <a:r>
               <a:rPr lang="en-US" sz="2200" dirty="0">
                 <a:solidFill>
-                  <a:srgbClr val="D6E6F2"/>
+                  <a:srgbClr val="DCE6F0"/>
                 </a:solidFill>
                 <a:latin typeface="Arial" pitchFamily="34" charset="0"/>
                 <a:ea typeface="Arial" pitchFamily="34" charset="-122"/>
@@ -3883,7 +4221,7 @@
             <a:r>
               <a:rPr lang="en-US" sz="1500" dirty="0">
                 <a:solidFill>
-                  <a:srgbClr val="A8C6E2"/>
+                  <a:srgbClr val="B9CBDE"/>
                 </a:solidFill>
                 <a:latin typeface="Arial" pitchFamily="34" charset="0"/>
                 <a:ea typeface="Arial" pitchFamily="34" charset="-122"/>
@@ -4061,11 +4399,11 @@
             </a:avLst>
           </a:prstGeom>
           <a:solidFill>
-            <a:srgbClr val="F8FAFC"/>
+            <a:srgbClr val="F5F7FA"/>
           </a:solidFill>
           <a:ln w="9525">
             <a:solidFill>
-              <a:srgbClr val="CBD5E1"/>
+              <a:srgbClr val="D8DEE6"/>
             </a:solidFill>
             <a:prstDash val="solid"/>
           </a:ln>
@@ -4260,11 +4598,11 @@
             </a:avLst>
           </a:prstGeom>
           <a:solidFill>
-            <a:srgbClr val="F8FAFC"/>
+            <a:srgbClr val="F5F7FA"/>
           </a:solidFill>
           <a:ln w="9525">
             <a:solidFill>
-              <a:srgbClr val="CBD5E1"/>
+              <a:srgbClr val="D8DEE6"/>
             </a:solidFill>
             <a:prstDash val="solid"/>
           </a:ln>
@@ -4297,7 +4635,7 @@
             <a:r>
               <a:rPr lang="en-US" sz="1900" b="1" dirty="0">
                 <a:solidFill>
-                  <a:srgbClr val="E70F47"/>
+                  <a:srgbClr val="9E4257"/>
                 </a:solidFill>
                 <a:latin typeface="Arial" pitchFamily="34" charset="0"/>
                 <a:ea typeface="Arial" pitchFamily="34" charset="-122"/>
@@ -4365,11 +4703,11 @@
             </a:avLst>
           </a:prstGeom>
           <a:solidFill>
-            <a:srgbClr val="F8FAFC"/>
+            <a:srgbClr val="F5F7FA"/>
           </a:solidFill>
           <a:ln w="9525">
             <a:solidFill>
-              <a:srgbClr val="CBD5E1"/>
+              <a:srgbClr val="D8DEE6"/>
             </a:solidFill>
             <a:prstDash val="solid"/>
           </a:ln>
@@ -4402,7 +4740,7 @@
             <a:r>
               <a:rPr lang="en-US" sz="1900" b="1" dirty="0">
                 <a:solidFill>
-                  <a:srgbClr val="E70F47"/>
+                  <a:srgbClr val="9E4257"/>
                 </a:solidFill>
                 <a:latin typeface="Arial" pitchFamily="34" charset="0"/>
                 <a:ea typeface="Arial" pitchFamily="34" charset="-122"/>
@@ -4470,11 +4808,11 @@
             </a:avLst>
           </a:prstGeom>
           <a:solidFill>
-            <a:srgbClr val="F8FAFC"/>
+            <a:srgbClr val="F5F7FA"/>
           </a:solidFill>
           <a:ln w="9525">
             <a:solidFill>
-              <a:srgbClr val="CBD5E1"/>
+              <a:srgbClr val="D8DEE6"/>
             </a:solidFill>
             <a:prstDash val="solid"/>
           </a:ln>
@@ -4507,7 +4845,7 @@
             <a:r>
               <a:rPr lang="en-US" sz="1900" b="1" dirty="0">
                 <a:solidFill>
-                  <a:srgbClr val="E70F47"/>
+                  <a:srgbClr val="9E4257"/>
                 </a:solidFill>
                 <a:latin typeface="Arial" pitchFamily="34" charset="0"/>
                 <a:ea typeface="Arial" pitchFamily="34" charset="-122"/>
@@ -4575,11 +4913,11 @@
             </a:avLst>
           </a:prstGeom>
           <a:solidFill>
-            <a:srgbClr val="F8FAFC"/>
+            <a:srgbClr val="F5F7FA"/>
           </a:solidFill>
           <a:ln w="9525">
             <a:solidFill>
-              <a:srgbClr val="CBD5E1"/>
+              <a:srgbClr val="D8DEE6"/>
             </a:solidFill>
             <a:prstDash val="solid"/>
           </a:ln>
@@ -4612,7 +4950,7 @@
             <a:r>
               <a:rPr lang="en-US" sz="1900" b="1" dirty="0">
                 <a:solidFill>
-                  <a:srgbClr val="E70F47"/>
+                  <a:srgbClr val="9E4257"/>
                 </a:solidFill>
                 <a:latin typeface="Arial" pitchFamily="34" charset="0"/>
                 <a:ea typeface="Arial" pitchFamily="34" charset="-122"/>
@@ -4716,7 +5054,7 @@
     <p:bg>
       <p:bgPr>
         <a:solidFill>
-          <a:srgbClr val="005AAA"/>
+          <a:srgbClr val="1E4270"/>
         </a:solidFill>
       </p:bgPr>
     </p:bg>
@@ -4843,7 +5181,7 @@
             <a:r>
               <a:rPr lang="en-US" sz="1500" dirty="0">
                 <a:solidFill>
-                  <a:srgbClr val="D6E6F2"/>
+                  <a:srgbClr val="DCE6F0"/>
                 </a:solidFill>
                 <a:latin typeface="Arial" pitchFamily="34" charset="0"/>
                 <a:ea typeface="Arial" pitchFamily="34" charset="-122"/>
